--- a/docs/Manual_Usuario.pptx
+++ b/docs/Manual_Usuario.pptx
@@ -2197,7 +2197,7 @@
                   <a:srgbClr val="1E293B"/>
                 </a:solidFill>
               </a:rPr>
-              <a:t>4. USO EN TERRENO (VISTA MÓVIL)</a:t>
+              <a:t>4. ACCESO DESDE CUALQUIER DISPOSITIVO</a:t>
             </a:r>
             <a:endParaRPr lang="en-US" sz="3200" dirty="0"/>
           </a:p>
@@ -2233,7 +2233,7 @@
                   <a:srgbClr val="475569"/>
                 </a:solidFill>
               </a:rPr>
-              <a:t>El validador es totalmente responsivo, lo que permite a los jefes de estadística o directivos revisar el estado de los archivos desde un smartphone o tablet durante reuniones o supervisiones en terreno.</a:t>
+              <a:t>El validador es totalmente responsivo. Los directivos y equipos técnicos pueden validar el estado de sus archivos desde cualquier smartphone, tablet o computador, facilitando una supervisión ágil y oportuna.</a:t>
             </a:r>
             <a:endParaRPr lang="en-US" sz="1400" dirty="0"/>
           </a:p>
